--- a/materials/Day4.pptx
+++ b/materials/Day4.pptx
@@ -13,29 +13,29 @@
     <p:sldId id="414" r:id="rId4"/>
     <p:sldId id="442" r:id="rId5"/>
     <p:sldId id="456" r:id="rId6"/>
-    <p:sldId id="544" r:id="rId7"/>
-    <p:sldId id="545" r:id="rId8"/>
+    <p:sldId id="558" r:id="rId7"/>
+    <p:sldId id="559" r:id="rId8"/>
     <p:sldId id="477" r:id="rId9"/>
-    <p:sldId id="546" r:id="rId10"/>
-    <p:sldId id="475" r:id="rId11"/>
-    <p:sldId id="476" r:id="rId12"/>
-    <p:sldId id="506" r:id="rId13"/>
-    <p:sldId id="547" r:id="rId14"/>
-    <p:sldId id="550" r:id="rId15"/>
-    <p:sldId id="548" r:id="rId16"/>
-    <p:sldId id="551" r:id="rId17"/>
-    <p:sldId id="549" r:id="rId18"/>
-    <p:sldId id="455" r:id="rId19"/>
-    <p:sldId id="508" r:id="rId20"/>
-    <p:sldId id="553" r:id="rId21"/>
-    <p:sldId id="554" r:id="rId22"/>
-    <p:sldId id="555" r:id="rId23"/>
-    <p:sldId id="509" r:id="rId24"/>
-    <p:sldId id="510" r:id="rId25"/>
-    <p:sldId id="534" r:id="rId26"/>
-    <p:sldId id="556" r:id="rId27"/>
-    <p:sldId id="557" r:id="rId28"/>
-    <p:sldId id="522" r:id="rId29"/>
+    <p:sldId id="560" r:id="rId10"/>
+    <p:sldId id="561" r:id="rId11"/>
+    <p:sldId id="562" r:id="rId12"/>
+    <p:sldId id="563" r:id="rId13"/>
+    <p:sldId id="564" r:id="rId14"/>
+    <p:sldId id="565" r:id="rId15"/>
+    <p:sldId id="566" r:id="rId16"/>
+    <p:sldId id="567" r:id="rId17"/>
+    <p:sldId id="568" r:id="rId18"/>
+    <p:sldId id="569" r:id="rId19"/>
+    <p:sldId id="570" r:id="rId20"/>
+    <p:sldId id="571" r:id="rId21"/>
+    <p:sldId id="572" r:id="rId22"/>
+    <p:sldId id="573" r:id="rId23"/>
+    <p:sldId id="574" r:id="rId24"/>
+    <p:sldId id="575" r:id="rId25"/>
+    <p:sldId id="576" r:id="rId26"/>
+    <p:sldId id="577" r:id="rId27"/>
+    <p:sldId id="583" r:id="rId28"/>
+    <p:sldId id="584" r:id="rId29"/>
     <p:sldId id="521" r:id="rId30"/>
     <p:sldId id="262" r:id="rId31"/>
   </p:sldIdLst>
@@ -3683,8 +3683,8 @@
         </p:nvSpPr>
         <p:spPr>
           <a:xfrm>
-            <a:off x="685800" y="6480000"/>
-            <a:ext cx="10820400" cy="300000"/>
+            <a:off x="685800" y="6350913"/>
+            <a:ext cx="10820400" cy="430887"/>
           </a:xfrm>
           <a:prstGeom prst="rect">
             <a:avLst/>
@@ -3693,7 +3693,7 @@
         </p:spPr>
         <p:txBody>
           <a:bodyPr wrap="square" lIns="0" tIns="0" rIns="0" bIns="0" rtlCol="0" anchor="t">
-            <a:noAutofit/>
+            <a:spAutoFit/>
           </a:bodyPr>
           <a:lstStyle/>
           <a:p>
@@ -3701,9 +3701,9 @@
               <a:buNone/>
             </a:pPr>
             <a:r>
-              <a:rPr lang="en-US" sz="1000" i="1" dirty="0">
+              <a:rPr lang="en-US" sz="1400" i="1" dirty="0">
                 <a:solidFill>
-                  <a:srgbClr val="6B6660"/>
+                  <a:srgbClr val="4A4741"/>
                 </a:solidFill>
                 <a:latin typeface="Calibri"/>
                 <a:cs typeface="Calibri"/>
@@ -3716,7 +3716,7 @@
     </p:spTree>
     <p:extLst>
       <p:ext uri="{BB962C8B-B14F-4D97-AF65-F5344CB8AC3E}">
-        <p14:creationId xmlns:p14="http://schemas.microsoft.com/office/powerpoint/2010/main" val="275302921"/>
+        <p14:creationId xmlns:p14="http://schemas.microsoft.com/office/powerpoint/2010/main" val="246778467"/>
       </p:ext>
     </p:extLst>
   </p:cSld>
@@ -3893,8 +3893,8 @@
         </p:nvSpPr>
         <p:spPr>
           <a:xfrm>
-            <a:off x="685800" y="5760000"/>
-            <a:ext cx="10820400" cy="620000"/>
+            <a:off x="685800" y="5613400"/>
+            <a:ext cx="10820400" cy="533400"/>
           </a:xfrm>
           <a:prstGeom prst="roundRect">
             <a:avLst>
@@ -3936,8 +3936,8 @@
         </p:nvSpPr>
         <p:spPr>
           <a:xfrm>
-            <a:off x="685800" y="6480000"/>
-            <a:ext cx="10820400" cy="300000"/>
+            <a:off x="685800" y="6153150"/>
+            <a:ext cx="10820400" cy="600164"/>
           </a:xfrm>
           <a:prstGeom prst="rect">
             <a:avLst/>
@@ -3946,7 +3946,7 @@
         </p:spPr>
         <p:txBody>
           <a:bodyPr wrap="square" lIns="0" tIns="0" rIns="0" bIns="0" rtlCol="0" anchor="t">
-            <a:noAutofit/>
+            <a:spAutoFit/>
           </a:bodyPr>
           <a:lstStyle/>
           <a:p>
@@ -3954,9 +3954,9 @@
               <a:buNone/>
             </a:pPr>
             <a:r>
-              <a:rPr lang="en-US" sz="1000" i="1" dirty="0">
+              <a:rPr lang="en-US" sz="1300" i="1" dirty="0">
                 <a:solidFill>
-                  <a:srgbClr val="6B6660"/>
+                  <a:srgbClr val="4A4741"/>
                 </a:solidFill>
                 <a:latin typeface="Calibri"/>
                 <a:cs typeface="Calibri"/>
@@ -3969,7 +3969,7 @@
     </p:spTree>
     <p:extLst>
       <p:ext uri="{BB962C8B-B14F-4D97-AF65-F5344CB8AC3E}">
-        <p14:creationId xmlns:p14="http://schemas.microsoft.com/office/powerpoint/2010/main" val="3943584741"/>
+        <p14:creationId xmlns:p14="http://schemas.microsoft.com/office/powerpoint/2010/main" val="3068903113"/>
       </p:ext>
     </p:extLst>
   </p:cSld>
@@ -4442,7 +4442,7 @@
         </p:nvSpPr>
         <p:spPr>
           <a:xfrm>
-            <a:off x="685800" y="5400000"/>
+            <a:off x="685800" y="5289550"/>
             <a:ext cx="10820400" cy="850000"/>
           </a:xfrm>
           <a:prstGeom prst="roundRect">
@@ -4500,8 +4500,8 @@
         </p:nvSpPr>
         <p:spPr>
           <a:xfrm>
-            <a:off x="685800" y="6480000"/>
-            <a:ext cx="10820400" cy="300000"/>
+            <a:off x="685800" y="6145900"/>
+            <a:ext cx="10820400" cy="646331"/>
           </a:xfrm>
           <a:prstGeom prst="rect">
             <a:avLst/>
@@ -4510,7 +4510,7 @@
         </p:spPr>
         <p:txBody>
           <a:bodyPr wrap="square" lIns="0" tIns="0" rIns="0" bIns="0" rtlCol="0" anchor="t">
-            <a:noAutofit/>
+            <a:spAutoFit/>
           </a:bodyPr>
           <a:lstStyle/>
           <a:p>
@@ -4518,9 +4518,9 @@
               <a:buNone/>
             </a:pPr>
             <a:r>
-              <a:rPr lang="en-US" sz="1000" i="1" dirty="0">
+              <a:rPr lang="en-US" sz="1400" i="1" dirty="0">
                 <a:solidFill>
-                  <a:srgbClr val="6B6660"/>
+                  <a:srgbClr val="4A4741"/>
                 </a:solidFill>
                 <a:latin typeface="Calibri"/>
                 <a:cs typeface="Calibri"/>
@@ -4533,7 +4533,7 @@
     </p:spTree>
     <p:extLst>
       <p:ext uri="{BB962C8B-B14F-4D97-AF65-F5344CB8AC3E}">
-        <p14:creationId xmlns:p14="http://schemas.microsoft.com/office/powerpoint/2010/main" val="3515080938"/>
+        <p14:creationId xmlns:p14="http://schemas.microsoft.com/office/powerpoint/2010/main" val="2123427628"/>
       </p:ext>
     </p:extLst>
   </p:cSld>
@@ -4632,7 +4632,7 @@
         </p:nvSpPr>
         <p:spPr>
           <a:xfrm>
-            <a:off x="685800" y="5600000"/>
+            <a:off x="685800" y="5498212"/>
             <a:ext cx="10820400" cy="840000"/>
           </a:xfrm>
           <a:prstGeom prst="roundRect">
@@ -4690,8 +4690,8 @@
         </p:nvSpPr>
         <p:spPr>
           <a:xfrm>
-            <a:off x="685800" y="6520000"/>
-            <a:ext cx="10820400" cy="274320"/>
+            <a:off x="685800" y="6344563"/>
+            <a:ext cx="10820400" cy="430887"/>
           </a:xfrm>
           <a:prstGeom prst="rect">
             <a:avLst/>
@@ -4700,7 +4700,7 @@
         </p:spPr>
         <p:txBody>
           <a:bodyPr wrap="square" lIns="0" tIns="0" rIns="0" bIns="0" rtlCol="0" anchor="t">
-            <a:noAutofit/>
+            <a:spAutoFit/>
           </a:bodyPr>
           <a:lstStyle/>
           <a:p>
@@ -4708,9 +4708,9 @@
               <a:buNone/>
             </a:pPr>
             <a:r>
-              <a:rPr lang="en-US" sz="1000" i="1" dirty="0">
+              <a:rPr lang="en-US" sz="1400" i="1" dirty="0">
                 <a:solidFill>
-                  <a:srgbClr val="6B6660"/>
+                  <a:srgbClr val="4A4741"/>
                 </a:solidFill>
                 <a:latin typeface="Calibri"/>
                 <a:cs typeface="Calibri"/>
@@ -4782,7 +4782,7 @@
     </p:spTree>
     <p:extLst>
       <p:ext uri="{BB962C8B-B14F-4D97-AF65-F5344CB8AC3E}">
-        <p14:creationId xmlns:p14="http://schemas.microsoft.com/office/powerpoint/2010/main" val="584654135"/>
+        <p14:creationId xmlns:p14="http://schemas.microsoft.com/office/powerpoint/2010/main" val="3716588286"/>
       </p:ext>
     </p:extLst>
   </p:cSld>
@@ -5386,8 +5386,8 @@
         </p:nvSpPr>
         <p:spPr>
           <a:xfrm>
-            <a:off x="685800" y="6520000"/>
-            <a:ext cx="10820400" cy="274320"/>
+            <a:off x="685800" y="6566356"/>
+            <a:ext cx="10820400" cy="215444"/>
           </a:xfrm>
           <a:prstGeom prst="rect">
             <a:avLst/>
@@ -5396,7 +5396,7 @@
         </p:spPr>
         <p:txBody>
           <a:bodyPr wrap="square" lIns="0" tIns="0" rIns="0" bIns="0" rtlCol="0" anchor="t">
-            <a:noAutofit/>
+            <a:spAutoFit/>
           </a:bodyPr>
           <a:lstStyle/>
           <a:p>
@@ -5404,9 +5404,9 @@
               <a:buNone/>
             </a:pPr>
             <a:r>
-              <a:rPr lang="en-US" sz="1000" i="1" dirty="0">
+              <a:rPr lang="en-US" sz="1400" i="1" dirty="0">
                 <a:solidFill>
-                  <a:srgbClr val="6B6660"/>
+                  <a:srgbClr val="4A4741"/>
                 </a:solidFill>
                 <a:latin typeface="Calibri"/>
                 <a:cs typeface="Calibri"/>
@@ -5443,7 +5443,7 @@
     </p:spTree>
     <p:extLst>
       <p:ext uri="{BB962C8B-B14F-4D97-AF65-F5344CB8AC3E}">
-        <p14:creationId xmlns:p14="http://schemas.microsoft.com/office/powerpoint/2010/main" val="152673596"/>
+        <p14:creationId xmlns:p14="http://schemas.microsoft.com/office/powerpoint/2010/main" val="2733465286"/>
       </p:ext>
     </p:extLst>
   </p:cSld>
@@ -5989,7 +5989,7 @@
         </p:nvSpPr>
         <p:spPr>
           <a:xfrm>
-            <a:off x="685800" y="5600000"/>
+            <a:off x="685800" y="5498212"/>
             <a:ext cx="10820400" cy="840000"/>
           </a:xfrm>
           <a:prstGeom prst="roundRect">
@@ -6047,8 +6047,8 @@
         </p:nvSpPr>
         <p:spPr>
           <a:xfrm>
-            <a:off x="685800" y="6520000"/>
-            <a:ext cx="10820400" cy="274320"/>
+            <a:off x="685800" y="6344563"/>
+            <a:ext cx="10820400" cy="430887"/>
           </a:xfrm>
           <a:prstGeom prst="rect">
             <a:avLst/>
@@ -6057,7 +6057,7 @@
         </p:spPr>
         <p:txBody>
           <a:bodyPr wrap="square" lIns="0" tIns="0" rIns="0" bIns="0" rtlCol="0" anchor="t">
-            <a:noAutofit/>
+            <a:spAutoFit/>
           </a:bodyPr>
           <a:lstStyle/>
           <a:p>
@@ -6065,9 +6065,9 @@
               <a:buNone/>
             </a:pPr>
             <a:r>
-              <a:rPr lang="en-US" sz="1000" i="1" dirty="0">
+              <a:rPr lang="en-US" sz="1400" i="1" dirty="0">
                 <a:solidFill>
-                  <a:srgbClr val="6B6660"/>
+                  <a:srgbClr val="4A4741"/>
                 </a:solidFill>
                 <a:latin typeface="Calibri"/>
                 <a:cs typeface="Calibri"/>
@@ -6080,7 +6080,7 @@
     </p:spTree>
     <p:extLst>
       <p:ext uri="{BB962C8B-B14F-4D97-AF65-F5344CB8AC3E}">
-        <p14:creationId xmlns:p14="http://schemas.microsoft.com/office/powerpoint/2010/main" val="4212514648"/>
+        <p14:creationId xmlns:p14="http://schemas.microsoft.com/office/powerpoint/2010/main" val="222667899"/>
       </p:ext>
     </p:extLst>
   </p:cSld>
@@ -6442,8 +6442,8 @@
         </p:nvSpPr>
         <p:spPr>
           <a:xfrm>
-            <a:off x="685800" y="6480000"/>
-            <a:ext cx="10820400" cy="274320"/>
+            <a:off x="685800" y="6350913"/>
+            <a:ext cx="10820400" cy="430887"/>
           </a:xfrm>
           <a:prstGeom prst="rect">
             <a:avLst/>
@@ -6452,7 +6452,7 @@
         </p:spPr>
         <p:txBody>
           <a:bodyPr wrap="square" lIns="0" tIns="0" rIns="0" bIns="0" rtlCol="0" anchor="t">
-            <a:noAutofit/>
+            <a:spAutoFit/>
           </a:bodyPr>
           <a:lstStyle/>
           <a:p>
@@ -6460,9 +6460,9 @@
               <a:buNone/>
             </a:pPr>
             <a:r>
-              <a:rPr lang="en-US" sz="1100" i="1" dirty="0">
+              <a:rPr lang="en-US" sz="1400" i="1" dirty="0">
                 <a:solidFill>
-                  <a:srgbClr val="6B6660"/>
+                  <a:srgbClr val="4A4741"/>
                 </a:solidFill>
                 <a:latin typeface="Calibri"/>
                 <a:cs typeface="Calibri"/>
@@ -6499,7 +6499,7 @@
     </p:spTree>
     <p:extLst>
       <p:ext uri="{BB962C8B-B14F-4D97-AF65-F5344CB8AC3E}">
-        <p14:creationId xmlns:p14="http://schemas.microsoft.com/office/powerpoint/2010/main" val="1099874689"/>
+        <p14:creationId xmlns:p14="http://schemas.microsoft.com/office/powerpoint/2010/main" val="2410046963"/>
       </p:ext>
     </p:extLst>
   </p:cSld>
@@ -7045,7 +7045,7 @@
         </p:nvSpPr>
         <p:spPr>
           <a:xfrm>
-            <a:off x="685800" y="5600000"/>
+            <a:off x="685800" y="5498212"/>
             <a:ext cx="10820400" cy="840000"/>
           </a:xfrm>
           <a:prstGeom prst="roundRect">
@@ -7103,8 +7103,8 @@
         </p:nvSpPr>
         <p:spPr>
           <a:xfrm>
-            <a:off x="685800" y="6520000"/>
-            <a:ext cx="10820400" cy="274320"/>
+            <a:off x="685800" y="6344563"/>
+            <a:ext cx="10820400" cy="430887"/>
           </a:xfrm>
           <a:prstGeom prst="rect">
             <a:avLst/>
@@ -7113,7 +7113,7 @@
         </p:spPr>
         <p:txBody>
           <a:bodyPr wrap="square" lIns="0" tIns="0" rIns="0" bIns="0" rtlCol="0" anchor="t">
-            <a:noAutofit/>
+            <a:spAutoFit/>
           </a:bodyPr>
           <a:lstStyle/>
           <a:p>
@@ -7121,9 +7121,9 @@
               <a:buNone/>
             </a:pPr>
             <a:r>
-              <a:rPr lang="en-US" sz="1000" i="1" dirty="0">
+              <a:rPr lang="en-US" sz="1400" i="1" dirty="0">
                 <a:solidFill>
-                  <a:srgbClr val="6B6660"/>
+                  <a:srgbClr val="4A4741"/>
                 </a:solidFill>
                 <a:latin typeface="Calibri"/>
                 <a:cs typeface="Calibri"/>
@@ -7136,7 +7136,7 @@
     </p:spTree>
     <p:extLst>
       <p:ext uri="{BB962C8B-B14F-4D97-AF65-F5344CB8AC3E}">
-        <p14:creationId xmlns:p14="http://schemas.microsoft.com/office/powerpoint/2010/main" val="4088995644"/>
+        <p14:creationId xmlns:p14="http://schemas.microsoft.com/office/powerpoint/2010/main" val="614893982"/>
       </p:ext>
     </p:extLst>
   </p:cSld>
@@ -7496,8 +7496,8 @@
         </p:nvSpPr>
         <p:spPr>
           <a:xfrm>
-            <a:off x="685800" y="6480000"/>
-            <a:ext cx="10820400" cy="274320"/>
+            <a:off x="685800" y="6566356"/>
+            <a:ext cx="10820400" cy="215444"/>
           </a:xfrm>
           <a:prstGeom prst="rect">
             <a:avLst/>
@@ -7506,7 +7506,7 @@
         </p:spPr>
         <p:txBody>
           <a:bodyPr wrap="square" lIns="0" tIns="0" rIns="0" bIns="0" rtlCol="0" anchor="t">
-            <a:noAutofit/>
+            <a:spAutoFit/>
           </a:bodyPr>
           <a:lstStyle/>
           <a:p>
@@ -7514,9 +7514,9 @@
               <a:buNone/>
             </a:pPr>
             <a:r>
-              <a:rPr lang="en-US" sz="1100" i="1" dirty="0">
+              <a:rPr lang="en-US" sz="1400" i="1" dirty="0">
                 <a:solidFill>
-                  <a:srgbClr val="6B6660"/>
+                  <a:srgbClr val="4A4741"/>
                 </a:solidFill>
                 <a:latin typeface="Calibri"/>
                 <a:cs typeface="Calibri"/>
@@ -7527,6 +7527,11 @@
         </p:txBody>
       </p:sp>
     </p:spTree>
+    <p:extLst>
+      <p:ext uri="{BB962C8B-B14F-4D97-AF65-F5344CB8AC3E}">
+        <p14:creationId xmlns:p14="http://schemas.microsoft.com/office/powerpoint/2010/main" val="1952450120"/>
+      </p:ext>
+    </p:extLst>
   </p:cSld>
   <p:clrMapOvr>
     <a:masterClrMapping/>
@@ -7728,8 +7733,8 @@
         </p:nvSpPr>
         <p:spPr>
           <a:xfrm>
-            <a:off x="685800" y="6480000"/>
-            <a:ext cx="10820400" cy="300000"/>
+            <a:off x="685800" y="6350913"/>
+            <a:ext cx="10820400" cy="430887"/>
           </a:xfrm>
           <a:prstGeom prst="rect">
             <a:avLst/>
@@ -7738,7 +7743,7 @@
         </p:spPr>
         <p:txBody>
           <a:bodyPr wrap="square" lIns="0" tIns="0" rIns="0" bIns="0" rtlCol="0" anchor="t">
-            <a:noAutofit/>
+            <a:spAutoFit/>
           </a:bodyPr>
           <a:lstStyle/>
           <a:p>
@@ -7746,9 +7751,9 @@
               <a:buNone/>
             </a:pPr>
             <a:r>
-              <a:rPr lang="en-US" sz="1000" i="1" dirty="0">
+              <a:rPr lang="en-US" sz="1400" i="1" dirty="0">
                 <a:solidFill>
-                  <a:srgbClr val="6B6660"/>
+                  <a:srgbClr val="4A4741"/>
                 </a:solidFill>
                 <a:latin typeface="Calibri"/>
                 <a:cs typeface="Calibri"/>
@@ -7761,7 +7766,7 @@
     </p:spTree>
     <p:extLst>
       <p:ext uri="{BB962C8B-B14F-4D97-AF65-F5344CB8AC3E}">
-        <p14:creationId xmlns:p14="http://schemas.microsoft.com/office/powerpoint/2010/main" val="3184348971"/>
+        <p14:creationId xmlns:p14="http://schemas.microsoft.com/office/powerpoint/2010/main" val="3822371569"/>
       </p:ext>
     </p:extLst>
   </p:cSld>
@@ -8502,8 +8507,8 @@
         </p:nvSpPr>
         <p:spPr>
           <a:xfrm>
-            <a:off x="685800" y="6480000"/>
-            <a:ext cx="10820400" cy="274320"/>
+            <a:off x="685800" y="6350913"/>
+            <a:ext cx="10820400" cy="430887"/>
           </a:xfrm>
           <a:prstGeom prst="rect">
             <a:avLst/>
@@ -8512,7 +8517,7 @@
         </p:spPr>
         <p:txBody>
           <a:bodyPr wrap="square" lIns="0" tIns="0" rIns="0" bIns="0" rtlCol="0" anchor="t">
-            <a:noAutofit/>
+            <a:spAutoFit/>
           </a:bodyPr>
           <a:lstStyle/>
           <a:p>
@@ -8520,9 +8525,9 @@
               <a:buNone/>
             </a:pPr>
             <a:r>
-              <a:rPr lang="en-US" sz="1100" i="1" dirty="0">
+              <a:rPr lang="en-US" sz="1400" i="1" dirty="0">
                 <a:solidFill>
-                  <a:srgbClr val="6B6660"/>
+                  <a:srgbClr val="4A4741"/>
                 </a:solidFill>
                 <a:latin typeface="Calibri"/>
                 <a:cs typeface="Calibri"/>
@@ -8535,7 +8540,7 @@
     </p:spTree>
     <p:extLst>
       <p:ext uri="{BB962C8B-B14F-4D97-AF65-F5344CB8AC3E}">
-        <p14:creationId xmlns:p14="http://schemas.microsoft.com/office/powerpoint/2010/main" val="1099874689"/>
+        <p14:creationId xmlns:p14="http://schemas.microsoft.com/office/powerpoint/2010/main" val="1952999897"/>
       </p:ext>
     </p:extLst>
   </p:cSld>
@@ -8979,8 +8984,8 @@
         </p:nvSpPr>
         <p:spPr>
           <a:xfrm>
-            <a:off x="685800" y="6480000"/>
-            <a:ext cx="10820400" cy="274320"/>
+            <a:off x="685800" y="6135469"/>
+            <a:ext cx="10820400" cy="646331"/>
           </a:xfrm>
           <a:prstGeom prst="rect">
             <a:avLst/>
@@ -8989,7 +8994,7 @@
         </p:spPr>
         <p:txBody>
           <a:bodyPr wrap="square" lIns="0" tIns="0" rIns="0" bIns="0" rtlCol="0" anchor="t">
-            <a:noAutofit/>
+            <a:spAutoFit/>
           </a:bodyPr>
           <a:lstStyle/>
           <a:p>
@@ -8997,9 +9002,9 @@
               <a:buNone/>
             </a:pPr>
             <a:r>
-              <a:rPr lang="en-US" sz="1100" i="1" dirty="0">
+              <a:rPr lang="en-US" sz="1400" i="1" dirty="0">
                 <a:solidFill>
-                  <a:srgbClr val="6B6660"/>
+                  <a:srgbClr val="4A4741"/>
                 </a:solidFill>
                 <a:latin typeface="Calibri"/>
                 <a:cs typeface="Calibri"/>
@@ -9036,7 +9041,7 @@
     </p:spTree>
     <p:extLst>
       <p:ext uri="{BB962C8B-B14F-4D97-AF65-F5344CB8AC3E}">
-        <p14:creationId xmlns:p14="http://schemas.microsoft.com/office/powerpoint/2010/main" val="2144265663"/>
+        <p14:creationId xmlns:p14="http://schemas.microsoft.com/office/powerpoint/2010/main" val="256378786"/>
       </p:ext>
     </p:extLst>
   </p:cSld>
@@ -9582,7 +9587,7 @@
         </p:nvSpPr>
         <p:spPr>
           <a:xfrm>
-            <a:off x="685800" y="5600000"/>
+            <a:off x="685800" y="5498212"/>
             <a:ext cx="10820400" cy="840000"/>
           </a:xfrm>
           <a:prstGeom prst="roundRect">
@@ -9640,8 +9645,8 @@
         </p:nvSpPr>
         <p:spPr>
           <a:xfrm>
-            <a:off x="685800" y="6520000"/>
-            <a:ext cx="10820400" cy="274320"/>
+            <a:off x="685800" y="6344563"/>
+            <a:ext cx="10820400" cy="430887"/>
           </a:xfrm>
           <a:prstGeom prst="rect">
             <a:avLst/>
@@ -9650,7 +9655,7 @@
         </p:spPr>
         <p:txBody>
           <a:bodyPr wrap="square" lIns="0" tIns="0" rIns="0" bIns="0" rtlCol="0" anchor="t">
-            <a:noAutofit/>
+            <a:spAutoFit/>
           </a:bodyPr>
           <a:lstStyle/>
           <a:p>
@@ -9658,9 +9663,9 @@
               <a:buNone/>
             </a:pPr>
             <a:r>
-              <a:rPr lang="en-US" sz="1000" i="1" dirty="0">
+              <a:rPr lang="en-US" sz="1400" i="1" dirty="0">
                 <a:solidFill>
-                  <a:srgbClr val="6B6660"/>
+                  <a:srgbClr val="4A4741"/>
                 </a:solidFill>
                 <a:latin typeface="Calibri"/>
                 <a:cs typeface="Calibri"/>
@@ -9673,7 +9678,7 @@
     </p:spTree>
     <p:extLst>
       <p:ext uri="{BB962C8B-B14F-4D97-AF65-F5344CB8AC3E}">
-        <p14:creationId xmlns:p14="http://schemas.microsoft.com/office/powerpoint/2010/main" val="4212514648"/>
+        <p14:creationId xmlns:p14="http://schemas.microsoft.com/office/powerpoint/2010/main" val="1550596731"/>
       </p:ext>
     </p:extLst>
   </p:cSld>
@@ -10219,7 +10224,7 @@
         </p:nvSpPr>
         <p:spPr>
           <a:xfrm>
-            <a:off x="685800" y="5600000"/>
+            <a:off x="685800" y="5498212"/>
             <a:ext cx="10820400" cy="840000"/>
           </a:xfrm>
           <a:prstGeom prst="roundRect">
@@ -10277,8 +10282,8 @@
         </p:nvSpPr>
         <p:spPr>
           <a:xfrm>
-            <a:off x="685800" y="6520000"/>
-            <a:ext cx="10820400" cy="274320"/>
+            <a:off x="685800" y="6344563"/>
+            <a:ext cx="10820400" cy="430887"/>
           </a:xfrm>
           <a:prstGeom prst="rect">
             <a:avLst/>
@@ -10287,7 +10292,7 @@
         </p:spPr>
         <p:txBody>
           <a:bodyPr wrap="square" lIns="0" tIns="0" rIns="0" bIns="0" rtlCol="0" anchor="t">
-            <a:noAutofit/>
+            <a:spAutoFit/>
           </a:bodyPr>
           <a:lstStyle/>
           <a:p>
@@ -10295,9 +10300,9 @@
               <a:buNone/>
             </a:pPr>
             <a:r>
-              <a:rPr lang="en-US" sz="1000" i="1" dirty="0">
+              <a:rPr lang="en-US" sz="1400" i="1" dirty="0">
                 <a:solidFill>
-                  <a:srgbClr val="6B6660"/>
+                  <a:srgbClr val="4A4741"/>
                 </a:solidFill>
                 <a:latin typeface="Calibri"/>
                 <a:cs typeface="Calibri"/>
@@ -10310,7 +10315,7 @@
     </p:spTree>
     <p:extLst>
       <p:ext uri="{BB962C8B-B14F-4D97-AF65-F5344CB8AC3E}">
-        <p14:creationId xmlns:p14="http://schemas.microsoft.com/office/powerpoint/2010/main" val="4022014867"/>
+        <p14:creationId xmlns:p14="http://schemas.microsoft.com/office/powerpoint/2010/main" val="1197326901"/>
       </p:ext>
     </p:extLst>
   </p:cSld>
@@ -10552,8 +10557,8 @@
         </p:nvSpPr>
         <p:spPr>
           <a:xfrm>
-            <a:off x="685800" y="6480000"/>
-            <a:ext cx="10820400" cy="274320"/>
+            <a:off x="685800" y="6566356"/>
+            <a:ext cx="10820400" cy="215444"/>
           </a:xfrm>
           <a:prstGeom prst="rect">
             <a:avLst/>
@@ -10562,7 +10567,7 @@
         </p:spPr>
         <p:txBody>
           <a:bodyPr wrap="square" lIns="0" tIns="0" rIns="0" bIns="0" rtlCol="0" anchor="t">
-            <a:noAutofit/>
+            <a:spAutoFit/>
           </a:bodyPr>
           <a:lstStyle/>
           <a:p>
@@ -10570,9 +10575,9 @@
               <a:buNone/>
             </a:pPr>
             <a:r>
-              <a:rPr lang="en-US" sz="1100" i="1" dirty="0">
+              <a:rPr lang="en-US" sz="1400" i="1" dirty="0">
                 <a:solidFill>
-                  <a:srgbClr val="6B6660"/>
+                  <a:srgbClr val="4A4741"/>
                 </a:solidFill>
                 <a:latin typeface="Calibri"/>
                 <a:cs typeface="Calibri"/>
@@ -10585,7 +10590,7 @@
     </p:spTree>
     <p:extLst>
       <p:ext uri="{BB962C8B-B14F-4D97-AF65-F5344CB8AC3E}">
-        <p14:creationId xmlns:p14="http://schemas.microsoft.com/office/powerpoint/2010/main" val="1973315423"/>
+        <p14:creationId xmlns:p14="http://schemas.microsoft.com/office/powerpoint/2010/main" val="2506043285"/>
       </p:ext>
     </p:extLst>
   </p:cSld>
@@ -10655,8 +10660,8 @@
         </p:nvSpPr>
         <p:spPr>
           <a:xfrm>
-            <a:off x="685800" y="6172200"/>
-            <a:ext cx="10820400" cy="558800"/>
+            <a:off x="685800" y="6135469"/>
+            <a:ext cx="10820400" cy="646331"/>
           </a:xfrm>
           <a:prstGeom prst="rect">
             <a:avLst/>
@@ -10665,7 +10670,7 @@
         </p:spPr>
         <p:txBody>
           <a:bodyPr wrap="square" lIns="0" tIns="0" rIns="0" bIns="0" rtlCol="0" anchor="t">
-            <a:noAutofit/>
+            <a:spAutoFit/>
           </a:bodyPr>
           <a:lstStyle/>
           <a:p>
@@ -10673,9 +10678,9 @@
               <a:buNone/>
             </a:pPr>
             <a:r>
-              <a:rPr lang="en-US" sz="1100" i="1" dirty="0">
+              <a:rPr lang="en-US" sz="1400" i="1" dirty="0">
                 <a:solidFill>
-                  <a:srgbClr val="6B6660"/>
+                  <a:srgbClr val="4A4741"/>
                 </a:solidFill>
                 <a:latin typeface="Calibri"/>
                 <a:cs typeface="Calibri"/>
@@ -16617,7 +16622,7 @@
     </p:spTree>
     <p:extLst>
       <p:ext uri="{BB962C8B-B14F-4D97-AF65-F5344CB8AC3E}">
-        <p14:creationId xmlns:p14="http://schemas.microsoft.com/office/powerpoint/2010/main" val="3911166807"/>
+        <p14:creationId xmlns:p14="http://schemas.microsoft.com/office/powerpoint/2010/main" val="3732902488"/>
       </p:ext>
     </p:extLst>
   </p:cSld>
@@ -16778,7 +16783,7 @@
         </p:nvSpPr>
         <p:spPr>
           <a:xfrm>
-            <a:off x="685800" y="5560000"/>
+            <a:off x="685800" y="5482769"/>
             <a:ext cx="10820400" cy="640000"/>
           </a:xfrm>
           <a:prstGeom prst="roundRect">
@@ -16821,8 +16826,8 @@
         </p:nvSpPr>
         <p:spPr>
           <a:xfrm>
-            <a:off x="685800" y="6480000"/>
-            <a:ext cx="10820400" cy="300000"/>
+            <a:off x="685800" y="6129119"/>
+            <a:ext cx="10820400" cy="646331"/>
           </a:xfrm>
           <a:prstGeom prst="rect">
             <a:avLst/>
@@ -16831,7 +16836,7 @@
         </p:spPr>
         <p:txBody>
           <a:bodyPr wrap="square" lIns="0" tIns="0" rIns="0" bIns="0" rtlCol="0" anchor="t">
-            <a:noAutofit/>
+            <a:spAutoFit/>
           </a:bodyPr>
           <a:lstStyle/>
           <a:p>
@@ -16839,9 +16844,9 @@
               <a:buNone/>
             </a:pPr>
             <a:r>
-              <a:rPr lang="en-US" sz="1000" i="1" dirty="0">
+              <a:rPr lang="en-US" sz="1400" i="1" dirty="0">
                 <a:solidFill>
-                  <a:srgbClr val="6B6660"/>
+                  <a:srgbClr val="4A4741"/>
                 </a:solidFill>
                 <a:latin typeface="Calibri"/>
                 <a:cs typeface="Calibri"/>
@@ -16854,7 +16859,7 @@
     </p:spTree>
     <p:extLst>
       <p:ext uri="{BB962C8B-B14F-4D97-AF65-F5344CB8AC3E}">
-        <p14:creationId xmlns:p14="http://schemas.microsoft.com/office/powerpoint/2010/main" val="3184348971"/>
+        <p14:creationId xmlns:p14="http://schemas.microsoft.com/office/powerpoint/2010/main" val="1570420871"/>
       </p:ext>
     </p:extLst>
   </p:cSld>
@@ -16911,7 +16916,7 @@
             </a:pPr>
             <a:r>
               <a:rPr lang="en-US" sz="3800" dirty="0"/>
-              <a:t>Calling Something a Cause Takes More Than a Correlation</a:t>
+              <a:t>A Correlation Becomes a Cause Only When Confounders Are Ruled Out</a:t>
             </a:r>
           </a:p>
         </p:txBody>
@@ -16953,8 +16958,8 @@
         </p:nvSpPr>
         <p:spPr>
           <a:xfrm>
-            <a:off x="685800" y="2250000"/>
-            <a:ext cx="10820400" cy="980000"/>
+            <a:off x="685800" y="2171700"/>
+            <a:ext cx="10820400" cy="1003300"/>
           </a:xfrm>
           <a:prstGeom prst="roundRect">
             <a:avLst>
@@ -16988,7 +16993,7 @@
         </p:nvSpPr>
         <p:spPr>
           <a:xfrm>
-            <a:off x="960120" y="2425000"/>
+            <a:off x="960120" y="2324100"/>
             <a:ext cx="6900000" cy="330000"/>
           </a:xfrm>
           <a:prstGeom prst="rect">
@@ -17013,7 +17018,7 @@
                 <a:latin typeface="Calibri"/>
                 <a:cs typeface="Calibri"/>
               </a:rPr>
-              <a:t>The correlation is the easy part</a:t>
+              <a:t>The correlation was the easy part — everyone had one</a:t>
             </a:r>
           </a:p>
         </p:txBody>
@@ -17026,8 +17031,8 @@
         </p:nvSpPr>
         <p:spPr>
           <a:xfrm>
-            <a:off x="960120" y="2805000"/>
-            <a:ext cx="7100000" cy="300000"/>
+            <a:off x="960120" y="2679700"/>
+            <a:ext cx="7100000" cy="457200"/>
           </a:xfrm>
           <a:prstGeom prst="rect">
             <a:avLst/>
@@ -17051,7 +17056,7 @@
                 <a:latin typeface="Calibri"/>
                 <a:cs typeface="Calibri"/>
               </a:rPr>
-              <a:t>r and p come from the two columns alone. Saturn and the cheese had both.</a:t>
+              <a:t>Saturn's orbit tracked engineering degrees at r = 0.987. Smoking tracked lung cancer. The number alone cannot tell coincidence from cause.</a:t>
             </a:r>
           </a:p>
         </p:txBody>
@@ -17064,7 +17069,7 @@
         </p:nvSpPr>
         <p:spPr>
           <a:xfrm>
-            <a:off x="8000000" y="2590000"/>
+            <a:off x="8000000" y="2514600"/>
             <a:ext cx="3230000" cy="300000"/>
           </a:xfrm>
           <a:prstGeom prst="rect">
@@ -17089,7 +17094,7 @@
                 <a:latin typeface="Calibri"/>
                 <a:cs typeface="Calibri"/>
               </a:rPr>
-              <a:t>FAULT 5</a:t>
+              <a:t>THE COINCIDENCE</a:t>
             </a:r>
           </a:p>
         </p:txBody>
@@ -17102,8 +17107,8 @@
         </p:nvSpPr>
         <p:spPr>
           <a:xfrm>
-            <a:off x="685800" y="3320000"/>
-            <a:ext cx="10820400" cy="980000"/>
+            <a:off x="685800" y="3403600"/>
+            <a:ext cx="10820400" cy="1003300"/>
           </a:xfrm>
           <a:prstGeom prst="roundRect">
             <a:avLst>
@@ -17137,7 +17142,7 @@
         </p:nvSpPr>
         <p:spPr>
           <a:xfrm>
-            <a:off x="960120" y="3495000"/>
+            <a:off x="960120" y="3556000"/>
             <a:ext cx="6900000" cy="330000"/>
           </a:xfrm>
           <a:prstGeom prst="rect">
@@ -17162,7 +17167,7 @@
                 <a:latin typeface="Calibri"/>
                 <a:cs typeface="Calibri"/>
               </a:rPr>
-              <a:t>The direction needs a prevalence</a:t>
+              <a:t>The forward probability is what made the case</a:t>
             </a:r>
           </a:p>
         </p:txBody>
@@ -17175,8 +17180,8 @@
         </p:nvSpPr>
         <p:spPr>
           <a:xfrm>
-            <a:off x="960120" y="3875000"/>
-            <a:ext cx="7100000" cy="300000"/>
+            <a:off x="960120" y="3911600"/>
+            <a:ext cx="7100000" cy="457200"/>
           </a:xfrm>
           <a:prstGeom prst="rect">
             <a:avLst/>
@@ -17200,7 +17205,7 @@
                 <a:latin typeface="Calibri"/>
                 <a:cs typeface="Calibri"/>
               </a:rPr>
-              <a:t>P( cancer | cigarettes ) is the claim. The 91% reverse is only how common smoking was.</a:t>
+              <a:t>16% of smokers got lung cancer vs. 2% of never-smokers — an eight-fold gap. “91% of patients smoked” just echoes that 65% of all men smoked.</a:t>
             </a:r>
           </a:p>
         </p:txBody>
@@ -17213,7 +17218,7 @@
         </p:nvSpPr>
         <p:spPr>
           <a:xfrm>
-            <a:off x="8000000" y="3660000"/>
+            <a:off x="8000000" y="3746500"/>
             <a:ext cx="3230000" cy="300000"/>
           </a:xfrm>
           <a:prstGeom prst="rect">
@@ -17238,7 +17243,7 @@
                 <a:latin typeface="Calibri"/>
                 <a:cs typeface="Calibri"/>
               </a:rPr>
-              <a:t>PROBABILITY REVERSAL</a:t>
+              <a:t>THE FORWARD QUESTION</a:t>
             </a:r>
           </a:p>
         </p:txBody>
@@ -17251,8 +17256,8 @@
         </p:nvSpPr>
         <p:spPr>
           <a:xfrm>
-            <a:off x="685800" y="4390000"/>
-            <a:ext cx="10820400" cy="980000"/>
+            <a:off x="685800" y="4635500"/>
+            <a:ext cx="10820400" cy="1003300"/>
           </a:xfrm>
           <a:prstGeom prst="roundRect">
             <a:avLst>
@@ -17286,7 +17291,7 @@
         </p:nvSpPr>
         <p:spPr>
           <a:xfrm>
-            <a:off x="960120" y="4565000"/>
+            <a:off x="960120" y="4787900"/>
             <a:ext cx="6900000" cy="330000"/>
           </a:xfrm>
           <a:prstGeom prst="rect">
@@ -17311,7 +17316,7 @@
                 <a:latin typeface="Calibri"/>
                 <a:cs typeface="Calibri"/>
               </a:rPr>
-              <a:t>Ruling out the rival needs another one</a:t>
+              <a:t>The rival explanation failed the same arithmetic</a:t>
             </a:r>
           </a:p>
         </p:txBody>
@@ -17324,8 +17329,8 @@
         </p:nvSpPr>
         <p:spPr>
           <a:xfrm>
-            <a:off x="960120" y="4945000"/>
-            <a:ext cx="7100000" cy="300000"/>
+            <a:off x="960120" y="5143500"/>
+            <a:ext cx="7100000" cy="457200"/>
           </a:xfrm>
           <a:prstGeom prst="rect">
             <a:avLst/>
@@ -17349,7 +17354,7 @@
                 <a:latin typeface="Calibri"/>
                 <a:cs typeface="Calibri"/>
               </a:rPr>
-              <a:t>The gene would have to be eight times as common among smokers. It is not.</a:t>
+              <a:t>Fisher's gene could only explain the gap if it were eight times as common among smokers. No trait was. The causal arrow survived.</a:t>
             </a:r>
           </a:p>
         </p:txBody>
@@ -17362,7 +17367,7 @@
         </p:nvSpPr>
         <p:spPr>
           <a:xfrm>
-            <a:off x="8000000" y="4730000"/>
+            <a:off x="8000000" y="4978400"/>
             <a:ext cx="3230000" cy="300000"/>
           </a:xfrm>
           <a:prstGeom prst="rect">
@@ -17387,7 +17392,7 @@
                 <a:latin typeface="Calibri"/>
                 <a:cs typeface="Calibri"/>
               </a:rPr>
-              <a:t>THE CONFOUNDER</a:t>
+              <a:t>THE RULED-OUT RIVAL</a:t>
             </a:r>
           </a:p>
         </p:txBody>
@@ -17400,8 +17405,8 @@
         </p:nvSpPr>
         <p:spPr>
           <a:xfrm>
-            <a:off x="685800" y="5600000"/>
-            <a:ext cx="10820400" cy="840000"/>
+            <a:off x="685800" y="5867400"/>
+            <a:ext cx="10820400" cy="381000"/>
           </a:xfrm>
           <a:prstGeom prst="roundRect">
             <a:avLst>
@@ -17430,22 +17435,7 @@
                 <a:latin typeface="Calibri"/>
                 <a:cs typeface="Calibri"/>
               </a:rPr>
-              <a:t>Every step past the correlation needed a prevalence the correlation never contained.</a:t>
-            </a:r>
-          </a:p>
-          <a:p>
-            <a:pPr marL="0" indent="0" algn="ctr">
-              <a:buNone/>
-            </a:pPr>
-            <a:r>
-              <a:rPr lang="en-US" sz="1400" b="1" dirty="0">
-                <a:solidFill>
-                  <a:srgbClr val="000000"/>
-                </a:solidFill>
-                <a:latin typeface="Calibri"/>
-                <a:cs typeface="Calibri"/>
-              </a:rPr>
-              <a:t>That is why the leap is a leap, and why the reversal's arithmetic is what closes it.</a:t>
+              <a:t>Saturn had the correlation; smoking had the forward gap and no rival left standing.</a:t>
             </a:r>
           </a:p>
         </p:txBody>
@@ -17458,8 +17448,8 @@
         </p:nvSpPr>
         <p:spPr>
           <a:xfrm>
-            <a:off x="685800" y="6520000"/>
-            <a:ext cx="10820400" cy="274320"/>
+            <a:off x="685800" y="6344563"/>
+            <a:ext cx="10820400" cy="430887"/>
           </a:xfrm>
           <a:prstGeom prst="rect">
             <a:avLst/>
@@ -17468,7 +17458,7 @@
         </p:spPr>
         <p:txBody>
           <a:bodyPr wrap="square" lIns="0" tIns="0" rIns="0" bIns="0" rtlCol="0" anchor="t">
-            <a:noAutofit/>
+            <a:spAutoFit/>
           </a:bodyPr>
           <a:lstStyle/>
           <a:p>
@@ -17476,9 +17466,9 @@
               <a:buNone/>
             </a:pPr>
             <a:r>
-              <a:rPr lang="en-US" sz="1000" i="1" dirty="0">
+              <a:rPr lang="en-US" sz="1400" i="1" dirty="0">
                 <a:solidFill>
-                  <a:srgbClr val="6B6660"/>
+                  <a:srgbClr val="4A4741"/>
                 </a:solidFill>
                 <a:latin typeface="Calibri"/>
                 <a:cs typeface="Calibri"/>
@@ -17491,7 +17481,7 @@
     </p:spTree>
     <p:extLst>
       <p:ext uri="{BB962C8B-B14F-4D97-AF65-F5344CB8AC3E}">
-        <p14:creationId xmlns:p14="http://schemas.microsoft.com/office/powerpoint/2010/main" val="4212514648"/>
+        <p14:creationId xmlns:p14="http://schemas.microsoft.com/office/powerpoint/2010/main" val="2646507732"/>
       </p:ext>
     </p:extLst>
   </p:cSld>
@@ -17598,58 +17588,20 @@
         </p:blipFill>
         <p:spPr>
           <a:xfrm>
-            <a:off x="1321877" y="2050000"/>
-            <a:ext cx="9548246" cy="3300000"/>
+            <a:off x="685800" y="2289413"/>
+            <a:ext cx="10820400" cy="3739673"/>
           </a:xfrm>
           <a:prstGeom prst="rect">
             <a:avLst/>
           </a:prstGeom>
         </p:spPr>
       </p:pic>
-      <p:sp>
-        <p:nvSpPr>
-          <p:cNvPr id="235" name="Band"/>
-          <p:cNvSpPr/>
-          <p:nvPr/>
-        </p:nvSpPr>
-        <p:spPr>
-          <a:xfrm>
-            <a:off x="685800" y="5560000"/>
-            <a:ext cx="10820400" cy="700000"/>
-          </a:xfrm>
-          <a:prstGeom prst="roundRect">
-            <a:avLst>
-              <a:gd name="adj" fmla="val 8000"/>
-            </a:avLst>
-          </a:prstGeom>
-          <a:solidFill>
-            <a:srgbClr val="EFEFEF"/>
-          </a:solidFill>
-          <a:ln>
-            <a:noFill/>
-          </a:ln>
-        </p:spPr>
-        <p:txBody>
-          <a:bodyPr lIns="182880" tIns="0" rIns="182880" bIns="0" rtlCol="0" anchor="ctr" anchorCtr="0"/>
-          <a:lstStyle/>
-          <a:p>
-            <a:pPr marL="0" indent="0" algn="ctr">
-              <a:buNone/>
-            </a:pPr>
-            <a:r>
-              <a:rPr lang="en-US" sz="1400" b="1" dirty="0">
-                <a:solidFill>
-                  <a:srgbClr val="000000"/>
-                </a:solidFill>
-                <a:latin typeface="Calibri"/>
-                <a:cs typeface="Calibri"/>
-              </a:rPr>
-              <a:t>Each question needs something the correlation does not contain: a population, a rival, a prevalence. That is why the leap is a leap.</a:t>
-            </a:r>
-          </a:p>
-        </p:txBody>
-      </p:sp>
     </p:spTree>
+    <p:extLst>
+      <p:ext uri="{BB962C8B-B14F-4D97-AF65-F5344CB8AC3E}">
+        <p14:creationId xmlns:p14="http://schemas.microsoft.com/office/powerpoint/2010/main" val="2914611003"/>
+      </p:ext>
+    </p:extLst>
   </p:cSld>
   <p:clrMapOvr>
     <a:masterClrMapping/>
@@ -20434,8 +20386,8 @@
         </p:nvSpPr>
         <p:spPr>
           <a:xfrm>
-            <a:off x="685800" y="6520000"/>
-            <a:ext cx="10820400" cy="274320"/>
+            <a:off x="685800" y="6350913"/>
+            <a:ext cx="10820400" cy="430887"/>
           </a:xfrm>
           <a:prstGeom prst="rect">
             <a:avLst/>
@@ -20444,7 +20396,7 @@
         </p:spPr>
         <p:txBody>
           <a:bodyPr wrap="square" lIns="0" tIns="0" rIns="0" bIns="0" rtlCol="0" anchor="t">
-            <a:noAutofit/>
+            <a:spAutoFit/>
           </a:bodyPr>
           <a:lstStyle/>
           <a:p>
@@ -20452,9 +20404,9 @@
               <a:buNone/>
             </a:pPr>
             <a:r>
-              <a:rPr lang="en-US" sz="1000" i="1" dirty="0">
+              <a:rPr lang="en-US" sz="1400" i="1" dirty="0">
                 <a:solidFill>
-                  <a:srgbClr val="6B6660"/>
+                  <a:srgbClr val="4A4741"/>
                 </a:solidFill>
                 <a:latin typeface="Calibri"/>
                 <a:cs typeface="Calibri"/>
@@ -20745,7 +20697,7 @@
     </p:spTree>
     <p:extLst>
       <p:ext uri="{BB962C8B-B14F-4D97-AF65-F5344CB8AC3E}">
-        <p14:creationId xmlns:p14="http://schemas.microsoft.com/office/powerpoint/2010/main" val="3378837917"/>
+        <p14:creationId xmlns:p14="http://schemas.microsoft.com/office/powerpoint/2010/main" val="1907899802"/>
       </p:ext>
     </p:extLst>
   </p:cSld>
@@ -20902,8 +20854,8 @@
         </p:nvSpPr>
         <p:spPr>
           <a:xfrm>
-            <a:off x="685800" y="6520000"/>
-            <a:ext cx="10820400" cy="274320"/>
+            <a:off x="685800" y="6566356"/>
+            <a:ext cx="10820400" cy="215444"/>
           </a:xfrm>
           <a:prstGeom prst="rect">
             <a:avLst/>
@@ -20912,7 +20864,7 @@
         </p:spPr>
         <p:txBody>
           <a:bodyPr wrap="square" lIns="0" tIns="0" rIns="0" bIns="0" rtlCol="0" anchor="t">
-            <a:noAutofit/>
+            <a:spAutoFit/>
           </a:bodyPr>
           <a:lstStyle/>
           <a:p>
@@ -20920,9 +20872,9 @@
               <a:buNone/>
             </a:pPr>
             <a:r>
-              <a:rPr lang="en-US" sz="1000" i="1" dirty="0">
+              <a:rPr lang="en-US" sz="1400" i="1" dirty="0">
                 <a:solidFill>
-                  <a:srgbClr val="6B6660"/>
+                  <a:srgbClr val="4A4741"/>
                 </a:solidFill>
                 <a:latin typeface="Calibri"/>
                 <a:cs typeface="Calibri"/>
@@ -20983,7 +20935,7 @@
     </p:spTree>
     <p:extLst>
       <p:ext uri="{BB962C8B-B14F-4D97-AF65-F5344CB8AC3E}">
-        <p14:creationId xmlns:p14="http://schemas.microsoft.com/office/powerpoint/2010/main" val="672753769"/>
+        <p14:creationId xmlns:p14="http://schemas.microsoft.com/office/powerpoint/2010/main" val="3985808009"/>
       </p:ext>
     </p:extLst>
   </p:cSld>
@@ -22179,7 +22131,7 @@
         </p:nvSpPr>
         <p:spPr>
           <a:xfrm>
-            <a:off x="685800" y="5600000"/>
+            <a:off x="685800" y="5498212"/>
             <a:ext cx="10820400" cy="840000"/>
           </a:xfrm>
           <a:prstGeom prst="roundRect">
@@ -22237,8 +22189,8 @@
         </p:nvSpPr>
         <p:spPr>
           <a:xfrm>
-            <a:off x="685800" y="6520000"/>
-            <a:ext cx="10820400" cy="274320"/>
+            <a:off x="685800" y="6344563"/>
+            <a:ext cx="10820400" cy="430887"/>
           </a:xfrm>
           <a:prstGeom prst="rect">
             <a:avLst/>
@@ -22247,7 +22199,7 @@
         </p:spPr>
         <p:txBody>
           <a:bodyPr wrap="square" lIns="0" tIns="0" rIns="0" bIns="0" rtlCol="0" anchor="t">
-            <a:noAutofit/>
+            <a:spAutoFit/>
           </a:bodyPr>
           <a:lstStyle/>
           <a:p>
@@ -22255,9 +22207,9 @@
               <a:buNone/>
             </a:pPr>
             <a:r>
-              <a:rPr lang="en-US" sz="1000" i="1" dirty="0">
+              <a:rPr lang="en-US" sz="1400" i="1" dirty="0">
                 <a:solidFill>
-                  <a:srgbClr val="6B6660"/>
+                  <a:srgbClr val="4A4741"/>
                 </a:solidFill>
                 <a:latin typeface="Calibri"/>
                 <a:cs typeface="Calibri"/>
@@ -22270,7 +22222,7 @@
     </p:spTree>
     <p:extLst>
       <p:ext uri="{BB962C8B-B14F-4D97-AF65-F5344CB8AC3E}">
-        <p14:creationId xmlns:p14="http://schemas.microsoft.com/office/powerpoint/2010/main" val="689644469"/>
+        <p14:creationId xmlns:p14="http://schemas.microsoft.com/office/powerpoint/2010/main" val="3897258041"/>
       </p:ext>
     </p:extLst>
   </p:cSld>
